--- a/course/slides/AF-TRACKF-M06/AF-TRACKF-M06-v1.pptx
+++ b/course/slides/AF-TRACKF-M06/AF-TRACKF-M06-v1.pptx
@@ -8433,7 +8433,7 @@
         </p:blipFill>
         <p:spPr>
           <a:xfrm>
-            <a:off x="609600" y="3185160"/>
+            <a:off x="609600" y="3020060"/>
             <a:ext cx="1016000" cy="1016000"/>
           </a:xfrm>
           <a:prstGeom prst="rect">
@@ -8449,7 +8449,7 @@
         </p:nvSpPr>
         <p:spPr>
           <a:xfrm>
-            <a:off x="2070100" y="3147060"/>
+            <a:off x="2070100" y="2981960"/>
             <a:ext cx="9563100" cy="619760"/>
           </a:xfrm>
           <a:prstGeom prst="rect">
@@ -8488,8 +8488,8 @@
         </p:nvSpPr>
         <p:spPr>
           <a:xfrm>
-            <a:off x="2070100" y="3931920"/>
-            <a:ext cx="9563100" cy="355600"/>
+            <a:off x="2070100" y="3766820"/>
+            <a:ext cx="9563100" cy="685800"/>
           </a:xfrm>
           <a:prstGeom prst="rect">
             <a:avLst/>
@@ -8514,7 +8514,23 @@
                 </a:solidFill>
                 <a:latin typeface="Lexend"/>
               </a:rPr>
-              <a:t>Isla is sixteen.</a:t>
+              <a:t>She wrote a checklist to test Stayproof, the inspection pack for boarding</a:t>
+            </a:r>
+          </a:p>
+          <a:p>
+            <a:pPr algn="l">
+              <a:lnSpc>
+                <a:spcPts val="2600"/>
+              </a:lnSpc>
+            </a:pPr>
+            <a:r>
+              <a:rPr sz="2000" b="0">
+                <a:solidFill>
+                  <a:srgbClr val="756E65"/>
+                </a:solidFill>
+                <a:latin typeface="Lexend"/>
+              </a:rPr>
+              <a:t>kennels, using Hollin Lane Kennels as her example.</a:t>
             </a:r>
           </a:p>
         </p:txBody>
@@ -10249,7 +10265,7 @@
         </p:blipFill>
         <p:spPr>
           <a:xfrm>
-            <a:off x="609600" y="3185160"/>
+            <a:off x="609600" y="3020060"/>
             <a:ext cx="1016000" cy="1016000"/>
           </a:xfrm>
           <a:prstGeom prst="rect">
@@ -10265,7 +10281,7 @@
         </p:nvSpPr>
         <p:spPr>
           <a:xfrm>
-            <a:off x="2070100" y="3147060"/>
+            <a:off x="2070100" y="2981960"/>
             <a:ext cx="9563100" cy="619760"/>
           </a:xfrm>
           <a:prstGeom prst="rect">
@@ -10304,8 +10320,8 @@
         </p:nvSpPr>
         <p:spPr>
           <a:xfrm>
-            <a:off x="2070100" y="3931920"/>
-            <a:ext cx="9563100" cy="355600"/>
+            <a:off x="2070100" y="3766820"/>
+            <a:ext cx="9563100" cy="685800"/>
           </a:xfrm>
           <a:prstGeom prst="rect">
             <a:avLst/>
@@ -10330,7 +10346,23 @@
                 </a:solidFill>
                 <a:latin typeface="Lexend"/>
               </a:rPr>
-              <a:t>Here is the clever part.</a:t>
+              <a:t>The leak tests are written now, in Stage 5, together with the build prompts,</a:t>
+            </a:r>
+          </a:p>
+          <a:p>
+            <a:pPr algn="l">
+              <a:lnSpc>
+                <a:spcPts val="2600"/>
+              </a:lnSpc>
+            </a:pPr>
+            <a:r>
+              <a:rPr sz="2000" b="0">
+                <a:solidFill>
+                  <a:srgbClr val="756E65"/>
+                </a:solidFill>
+                <a:latin typeface="Lexend"/>
+              </a:rPr>
+              <a:t>before a single credit is spent.</a:t>
             </a:r>
           </a:p>
         </p:txBody>
@@ -10695,7 +10727,7 @@
         </p:blipFill>
         <p:spPr>
           <a:xfrm>
-            <a:off x="609600" y="3185160"/>
+            <a:off x="609600" y="3020060"/>
             <a:ext cx="1016000" cy="1016000"/>
           </a:xfrm>
           <a:prstGeom prst="rect">
@@ -10711,7 +10743,7 @@
         </p:nvSpPr>
         <p:spPr>
           <a:xfrm>
-            <a:off x="2070100" y="3147060"/>
+            <a:off x="2070100" y="2981960"/>
             <a:ext cx="9563100" cy="619760"/>
           </a:xfrm>
           <a:prstGeom prst="rect">
@@ -10750,8 +10782,8 @@
         </p:nvSpPr>
         <p:spPr>
           <a:xfrm>
-            <a:off x="2070100" y="3931920"/>
-            <a:ext cx="9563100" cy="355600"/>
+            <a:off x="2070100" y="3766820"/>
+            <a:ext cx="9563100" cy="685800"/>
           </a:xfrm>
           <a:prstGeom prst="rect">
             <a:avLst/>
@@ -10776,7 +10808,23 @@
                 </a:solidFill>
                 <a:latin typeface="Lexend"/>
               </a:rPr>
-              <a:t>Next, money.</a:t>
+              <a:t>The factory estimates how many credits the build will take and writes it on</a:t>
+            </a:r>
+          </a:p>
+          <a:p>
+            <a:pPr algn="l">
+              <a:lnSpc>
+                <a:spcPts val="2600"/>
+              </a:lnSpc>
+            </a:pPr>
+            <a:r>
+              <a:rPr sz="2000" b="0">
+                <a:solidFill>
+                  <a:srgbClr val="756E65"/>
+                </a:solidFill>
+                <a:latin typeface="Lexend"/>
+              </a:rPr>
+              <a:t>the app's card as the word credits, then a number.</a:t>
             </a:r>
           </a:p>
         </p:txBody>
@@ -14098,7 +14146,7 @@
         </p:blipFill>
         <p:spPr>
           <a:xfrm>
-            <a:off x="609600" y="3185160"/>
+            <a:off x="609600" y="3020060"/>
             <a:ext cx="1016000" cy="1016000"/>
           </a:xfrm>
           <a:prstGeom prst="rect">
@@ -14114,7 +14162,7 @@
         </p:nvSpPr>
         <p:spPr>
           <a:xfrm>
-            <a:off x="2070100" y="3147060"/>
+            <a:off x="2070100" y="2981960"/>
             <a:ext cx="9563100" cy="619760"/>
           </a:xfrm>
           <a:prstGeom prst="rect">
@@ -14153,8 +14201,8 @@
         </p:nvSpPr>
         <p:spPr>
           <a:xfrm>
-            <a:off x="2070100" y="3931920"/>
-            <a:ext cx="9563100" cy="355600"/>
+            <a:off x="2070100" y="3766820"/>
+            <a:ext cx="9563100" cy="685800"/>
           </a:xfrm>
           <a:prstGeom prst="rect">
             <a:avLst/>
@@ -14179,7 +14227,23 @@
                 </a:solidFill>
                 <a:latin typeface="Lexend"/>
               </a:rPr>
-              <a:t>Meet Sam.</a:t>
+              <a:t>He is fourteen, and he was helping to test Trimtable, the booking and client</a:t>
+            </a:r>
+          </a:p>
+          <a:p>
+            <a:pPr algn="l">
+              <a:lnSpc>
+                <a:spcPts val="2600"/>
+              </a:lnSpc>
+            </a:pPr>
+            <a:r>
+              <a:rPr sz="2000" b="0">
+                <a:solidFill>
+                  <a:srgbClr val="756E65"/>
+                </a:solidFill>
+                <a:latin typeface="Lexend"/>
+              </a:rPr>
+              <a:t>desk for dog groomers.</a:t>
             </a:r>
           </a:p>
         </p:txBody>
@@ -14544,7 +14608,7 @@
         </p:blipFill>
         <p:spPr>
           <a:xfrm>
-            <a:off x="609600" y="3185160"/>
+            <a:off x="609600" y="3020060"/>
             <a:ext cx="1016000" cy="1016000"/>
           </a:xfrm>
           <a:prstGeom prst="rect">
@@ -14560,7 +14624,7 @@
         </p:nvSpPr>
         <p:spPr>
           <a:xfrm>
-            <a:off x="2070100" y="3147060"/>
+            <a:off x="2070100" y="2981960"/>
             <a:ext cx="9563100" cy="619760"/>
           </a:xfrm>
           <a:prstGeom prst="rect">
@@ -14599,8 +14663,8 @@
         </p:nvSpPr>
         <p:spPr>
           <a:xfrm>
-            <a:off x="2070100" y="3931920"/>
-            <a:ext cx="9563100" cy="355600"/>
+            <a:off x="2070100" y="3766820"/>
+            <a:ext cx="9563100" cy="685800"/>
           </a:xfrm>
           <a:prstGeom prst="rect">
             <a:avLst/>
@@ -14625,7 +14689,23 @@
                 </a:solidFill>
                 <a:latin typeface="Lexend"/>
               </a:rPr>
-              <a:t>This is Stage 5, called Data.</a:t>
+              <a:t>It happens in the room called Rig, the same room where the tables were built</a:t>
+            </a:r>
+          </a:p>
+          <a:p>
+            <a:pPr algn="l">
+              <a:lnSpc>
+                <a:spcPts val="2600"/>
+              </a:lnSpc>
+            </a:pPr>
+            <a:r>
+              <a:rPr sz="2000" b="0">
+                <a:solidFill>
+                  <a:srgbClr val="756E65"/>
+                </a:solidFill>
+                <a:latin typeface="Lexend"/>
+              </a:rPr>
+              <a:t>by hand in Stage 4.</a:t>
             </a:r>
           </a:p>
         </p:txBody>
@@ -14990,7 +15070,7 @@
         </p:blipFill>
         <p:spPr>
           <a:xfrm>
-            <a:off x="609600" y="3185160"/>
+            <a:off x="609600" y="3020060"/>
             <a:ext cx="1016000" cy="1016000"/>
           </a:xfrm>
           <a:prstGeom prst="rect">
@@ -15006,7 +15086,7 @@
         </p:nvSpPr>
         <p:spPr>
           <a:xfrm>
-            <a:off x="2070100" y="3147060"/>
+            <a:off x="2070100" y="2981960"/>
             <a:ext cx="9563100" cy="619760"/>
           </a:xfrm>
           <a:prstGeom prst="rect">
@@ -15045,8 +15125,8 @@
         </p:nvSpPr>
         <p:spPr>
           <a:xfrm>
-            <a:off x="2070100" y="3931920"/>
-            <a:ext cx="9563100" cy="355600"/>
+            <a:off x="2070100" y="3766820"/>
+            <a:ext cx="9563100" cy="685800"/>
           </a:xfrm>
           <a:prstGeom prst="rect">
             <a:avLst/>
@@ -15071,7 +15151,23 @@
                 </a:solidFill>
                 <a:latin typeface="Lexend"/>
               </a:rPr>
-              <a:t>First, the test tenants.</a:t>
+              <a:t>A tenant is one business that uses the app, with its own name and its own</a:t>
+            </a:r>
+          </a:p>
+          <a:p>
+            <a:pPr algn="l">
+              <a:lnSpc>
+                <a:spcPts val="2600"/>
+              </a:lnSpc>
+            </a:pPr>
+            <a:r>
+              <a:rPr sz="2000" b="0">
+                <a:solidFill>
+                  <a:srgbClr val="756E65"/>
+                </a:solidFill>
+                <a:latin typeface="Lexend"/>
+              </a:rPr>
+              <a:t>data.</a:t>
             </a:r>
           </a:p>
         </p:txBody>
@@ -15436,7 +15532,7 @@
         </p:blipFill>
         <p:spPr>
           <a:xfrm>
-            <a:off x="609600" y="3185160"/>
+            <a:off x="609600" y="3020060"/>
             <a:ext cx="1016000" cy="1016000"/>
           </a:xfrm>
           <a:prstGeom prst="rect">
@@ -15452,7 +15548,7 @@
         </p:nvSpPr>
         <p:spPr>
           <a:xfrm>
-            <a:off x="2070100" y="3147060"/>
+            <a:off x="2070100" y="2981960"/>
             <a:ext cx="9563100" cy="619760"/>
           </a:xfrm>
           <a:prstGeom prst="rect">
@@ -15491,8 +15587,8 @@
         </p:nvSpPr>
         <p:spPr>
           <a:xfrm>
-            <a:off x="2070100" y="3931920"/>
-            <a:ext cx="9563100" cy="355600"/>
+            <a:off x="2070100" y="3766820"/>
+            <a:ext cx="9563100" cy="685800"/>
           </a:xfrm>
           <a:prstGeom prst="rect">
             <a:avLst/>
@@ -15517,7 +15613,23 @@
                 </a:solidFill>
                 <a:latin typeface="Lexend"/>
               </a:rPr>
-              <a:t>The two test tenants must be contrasting.</a:t>
+              <a:t>That word comes straight from the duty list: the second tenant gets different</a:t>
+            </a:r>
+          </a:p>
+          <a:p>
+            <a:pPr algn="l">
+              <a:lnSpc>
+                <a:spcPts val="2600"/>
+              </a:lnSpc>
+            </a:pPr>
+            <a:r>
+              <a:rPr sz="2000" b="0">
+                <a:solidFill>
+                  <a:srgbClr val="756E65"/>
+                </a:solidFill>
+                <a:latin typeface="Lexend"/>
+              </a:rPr>
+              <a:t>names, different lanes and different colours, so that a...</a:t>
             </a:r>
           </a:p>
         </p:txBody>
@@ -15882,7 +15994,7 @@
         </p:blipFill>
         <p:spPr>
           <a:xfrm>
-            <a:off x="609600" y="3185160"/>
+            <a:off x="609600" y="3020060"/>
             <a:ext cx="1016000" cy="1016000"/>
           </a:xfrm>
           <a:prstGeom prst="rect">
@@ -15898,7 +16010,7 @@
         </p:nvSpPr>
         <p:spPr>
           <a:xfrm>
-            <a:off x="2070100" y="3147060"/>
+            <a:off x="2070100" y="2981960"/>
             <a:ext cx="9563100" cy="619760"/>
           </a:xfrm>
           <a:prstGeom prst="rect">
@@ -15937,8 +16049,8 @@
         </p:nvSpPr>
         <p:spPr>
           <a:xfrm>
-            <a:off x="2070100" y="3931920"/>
-            <a:ext cx="9563100" cy="355600"/>
+            <a:off x="2070100" y="3766820"/>
+            <a:ext cx="9563100" cy="685800"/>
           </a:xfrm>
           <a:prstGeom prst="rect">
             <a:avLst/>
@@ -15963,7 +16075,23 @@
                 </a:solidFill>
                 <a:latin typeface="Lexend"/>
               </a:rPr>
-              <a:t>There is a trap here worth knowing.</a:t>
+              <a:t>On the build platform, the preview version of the app and the live version</a:t>
+            </a:r>
+          </a:p>
+          <a:p>
+            <a:pPr algn="l">
+              <a:lnSpc>
+                <a:spcPts val="2600"/>
+              </a:lnSpc>
+            </a:pPr>
+            <a:r>
+              <a:rPr sz="2000" b="0">
+                <a:solidFill>
+                  <a:srgbClr val="756E65"/>
+                </a:solidFill>
+                <a:latin typeface="Lexend"/>
+              </a:rPr>
+              <a:t>share one database.</a:t>
             </a:r>
           </a:p>
         </p:txBody>
@@ -16409,7 +16537,7 @@
                 </a:solidFill>
                 <a:latin typeface="Lexend"/>
               </a:rPr>
-              <a:t>Next come the test identities.</a:t>
+              <a:t>A test identity is a pretend person with a real sign-in, used only for testing.</a:t>
             </a:r>
           </a:p>
         </p:txBody>
@@ -16855,7 +16983,7 @@
                 </a:solidFill>
                 <a:latin typeface="Lexend"/>
               </a:rPr>
-              <a:t>Two rules sit on top of this.</a:t>
+              <a:t>First, no Google single sign-on for test members.</a:t>
             </a:r>
           </a:p>
         </p:txBody>
